--- a/assets/ppts/M2.1.2_Transport_Protocols_UDP.pptx
+++ b/assets/ppts/M2.1.2_Transport_Protocols_UDP.pptx
@@ -8,6 +8,7 @@
     <p:sldId id="256" r:id="rId7"/>
     <p:sldId id="257" r:id="rId8"/>
     <p:sldId id="258" r:id="rId9"/>
+    <p:sldId id="259" r:id="rId10"/>
   </p:sldIdLst>
   <p:sldSz cx="12191695" cy="6858000" type="screen4x3"/>
   <p:notesSz cx="6858000" cy="9144000"/>
@@ -3141,8 +3142,8 @@
         </p:nvSpPr>
         <p:spPr>
           <a:xfrm>
-            <a:off x="822960" y="1188720"/>
-            <a:ext cx="164592" cy="4480560"/>
+            <a:off x="0" y="0"/>
+            <a:ext cx="12191695" cy="137160"/>
           </a:xfrm>
           <a:prstGeom prst="rect">
             <a:avLst/>
@@ -3178,14 +3179,57 @@
       </p:sp>
       <p:sp>
         <p:nvSpPr>
-          <p:cNvPr id="4" name="TextBox 3"/>
+          <p:cNvPr id="4" name="Rectangle 3"/>
+          <p:cNvSpPr/>
+          <p:nvPr/>
+        </p:nvSpPr>
+        <p:spPr>
+          <a:xfrm>
+            <a:off x="822960" y="1097280"/>
+            <a:ext cx="164592" cy="4663440"/>
+          </a:xfrm>
+          <a:prstGeom prst="rect">
+            <a:avLst/>
+          </a:prstGeom>
+          <a:solidFill>
+            <a:srgbClr val="D97706"/>
+          </a:solidFill>
+          <a:ln>
+            <a:noFill/>
+          </a:ln>
+        </p:spPr>
+        <p:style>
+          <a:lnRef idx="1">
+            <a:schemeClr val="accent1"/>
+          </a:lnRef>
+          <a:fillRef idx="3">
+            <a:schemeClr val="accent1"/>
+          </a:fillRef>
+          <a:effectRef idx="2">
+            <a:schemeClr val="accent1"/>
+          </a:effectRef>
+          <a:fontRef idx="minor">
+            <a:schemeClr val="lt1"/>
+          </a:fontRef>
+        </p:style>
+        <p:txBody>
+          <a:bodyPr rtlCol="0" anchor="ctr"/>
+          <a:lstStyle/>
+          <a:p>
+            <a:pPr algn="ctr"/>
+          </a:p>
+        </p:txBody>
+      </p:sp>
+      <p:sp>
+        <p:nvSpPr>
+          <p:cNvPr id="5" name="TextBox 4"/>
           <p:cNvSpPr txBox="1"/>
           <p:nvPr/>
         </p:nvSpPr>
         <p:spPr>
           <a:xfrm>
-            <a:off x="1280160" y="1097280"/>
-            <a:ext cx="10058400" cy="4663440"/>
+            <a:off x="1234440" y="1005840"/>
+            <a:ext cx="10241280" cy="4846320"/>
           </a:xfrm>
           <a:prstGeom prst="rect">
             <a:avLst/>
@@ -3200,70 +3244,165 @@
           <a:p>
             <a:pPr>
               <a:spcAft>
+                <a:spcPts val="1000"/>
+              </a:spcAft>
+              <a:defRPr b="1" sz="1300">
+                <a:solidFill>
+                  <a:srgbClr val="D97706"/>
+                </a:solidFill>
+              </a:defRPr>
+            </a:pPr>
+            <a:r>
+              <a:t>PCCST501 Computer Networks | KTU 2024 Scheme • MODULE 2 • M2.1.2</a:t>
+            </a:r>
+          </a:p>
+          <a:p>
+            <a:pPr>
+              <a:spcAft>
                 <a:spcPts val="1200"/>
               </a:spcAft>
-              <a:defRPr b="1" sz="1300">
-                <a:solidFill>
-                  <a:srgbClr val="D97706"/>
-                </a:solidFill>
-              </a:defRPr>
-            </a:pPr>
-            <a:r>
-              <a:t>PCCST501 Computer Networks | KTU 2024 Scheme • MODULE 2 • M2.1.2</a:t>
+              <a:defRPr b="1" sz="3000">
+                <a:solidFill>
+                  <a:srgbClr val="F8FAFC"/>
+                </a:solidFill>
+              </a:defRPr>
+            </a:pPr>
+            <a:r>
+              <a:t>Transport Protocols &amp; User Datagram Protocol (UDP)</a:t>
             </a:r>
           </a:p>
           <a:p>
             <a:pPr>
               <a:spcAft>
-                <a:spcPts val="1400"/>
+                <a:spcPts val="2400"/>
               </a:spcAft>
-              <a:defRPr b="1" sz="3200">
-                <a:solidFill>
-                  <a:srgbClr val="F8FAFC"/>
-                </a:solidFill>
-              </a:defRPr>
-            </a:pPr>
-            <a:r>
-              <a:t>User Datagram Protocol (UDP)</a:t>
+              <a:defRPr sz="1600">
+                <a:solidFill>
+                  <a:srgbClr val="94A3B8"/>
+                </a:solidFill>
+              </a:defRPr>
+            </a:pPr>
+            <a:r>
+              <a:t>UDP Segment Header Structure, 16-Bit 1's Complement Checksum with Pseudo-Header, UDP Applications &amp; Use Cases</a:t>
             </a:r>
           </a:p>
           <a:p>
             <a:pPr>
               <a:spcAft>
-                <a:spcPts val="2800"/>
+                <a:spcPts val="300"/>
               </a:spcAft>
-              <a:defRPr sz="1700">
+              <a:defRPr b="1" sz="1350">
+                <a:solidFill>
+                  <a:srgbClr val="E2E8F0"/>
+                </a:solidFill>
+              </a:defRPr>
+            </a:pPr>
+            <a:r>
+              <a:t>Prepared by: Prof. Anju Markose | Assistant Professor, Dept. of CSE | VJCET</a:t>
+            </a:r>
+          </a:p>
+          <a:p>
+            <a:pPr>
+              <a:defRPr sz="1150">
                 <a:solidFill>
                   <a:srgbClr val="94A3B8"/>
                 </a:solidFill>
               </a:defRPr>
             </a:pPr>
             <a:r>
-              <a:t>Connectionless Transport, 8-Byte Minimal Header, 1's Complement Checksum Calculation with Pseudo-Header</a:t>
-            </a:r>
-          </a:p>
+              <a:t>Viswajyothi College of Engineering and Technology (VJCET), Vazhakulam • KTU S5 CSE</a:t>
+            </a:r>
+          </a:p>
+        </p:txBody>
+      </p:sp>
+      <p:sp>
+        <p:nvSpPr>
+          <p:cNvPr id="6" name="Rounded Rectangle 5"/>
+          <p:cNvSpPr/>
+          <p:nvPr/>
+        </p:nvSpPr>
+        <p:spPr>
+          <a:xfrm>
+            <a:off x="8412480" y="5120640"/>
+            <a:ext cx="3017520" cy="822960"/>
+          </a:xfrm>
+          <a:prstGeom prst="roundRect">
+            <a:avLst/>
+          </a:prstGeom>
+          <a:solidFill>
+            <a:srgbClr val="1E293B"/>
+          </a:solidFill>
+          <a:ln w="12700">
+            <a:solidFill>
+              <a:srgbClr val="0E7490"/>
+            </a:solidFill>
+          </a:ln>
+        </p:spPr>
+        <p:style>
+          <a:lnRef idx="1">
+            <a:schemeClr val="accent1"/>
+          </a:lnRef>
+          <a:fillRef idx="3">
+            <a:schemeClr val="accent1"/>
+          </a:fillRef>
+          <a:effectRef idx="2">
+            <a:schemeClr val="accent1"/>
+          </a:effectRef>
+          <a:fontRef idx="minor">
+            <a:schemeClr val="lt1"/>
+          </a:fontRef>
+        </p:style>
+        <p:txBody>
+          <a:bodyPr rtlCol="0" anchor="ctr"/>
+          <a:lstStyle/>
+          <a:p>
+            <a:pPr algn="ctr"/>
+          </a:p>
+        </p:txBody>
+      </p:sp>
+      <p:sp>
+        <p:nvSpPr>
+          <p:cNvPr id="7" name="TextBox 6"/>
+          <p:cNvSpPr txBox="1"/>
+          <p:nvPr/>
+        </p:nvSpPr>
+        <p:spPr>
+          <a:xfrm>
+            <a:off x="8503920" y="5166360"/>
+            <a:ext cx="2834640" cy="731520"/>
+          </a:xfrm>
+          <a:prstGeom prst="rect">
+            <a:avLst/>
+          </a:prstGeom>
+          <a:noFill/>
+        </p:spPr>
+        <p:txBody>
+          <a:bodyPr wrap="none">
+            <a:spAutoFit/>
+          </a:bodyPr>
+          <a:lstStyle/>
           <a:p>
             <a:pPr>
-              <a:defRPr b="1" sz="1300">
-                <a:solidFill>
-                  <a:srgbClr val="E2E8F0"/>
-                </a:solidFill>
-              </a:defRPr>
-            </a:pPr>
-            <a:r>
-              <a:t>Prepared by: Prof. Anju Markose | Assistant Professor, Dept. of CSE | VJCET</a:t>
+              <a:defRPr b="1" sz="1050">
+                <a:solidFill>
+                  <a:srgbClr val="D97706"/>
+                </a:solidFill>
+              </a:defRPr>
+            </a:pPr>
+            <a:r>
+              <a:t>KTU B.Tech Curriculum</a:t>
             </a:r>
           </a:p>
           <a:p>
             <a:pPr>
-              <a:defRPr sz="1100">
-                <a:solidFill>
-                  <a:srgbClr val="94A3B8"/>
-                </a:solidFill>
-              </a:defRPr>
-            </a:pPr>
-            <a:r>
-              <a:t>Viswajyothi College of Engineering and Technology (VJCET), Vazhakulam</a:t>
+              <a:defRPr sz="950">
+                <a:solidFill>
+                  <a:srgbClr val="F8FAFC"/>
+                </a:solidFill>
+              </a:defRPr>
+            </a:pPr>
+            <a:r>
+              <a:t>Official Classroom Slide Deck</a:t>
             </a:r>
           </a:p>
         </p:txBody>
@@ -3395,14 +3534,14 @@
           <a:lstStyle/>
           <a:p>
             <a:pPr>
-              <a:defRPr b="1" sz="2300">
+              <a:defRPr b="1" sz="2200">
                 <a:solidFill>
                   <a:srgbClr val="F8FAFC"/>
                 </a:solidFill>
               </a:defRPr>
             </a:pPr>
             <a:r>
-              <a:t>2.1.2.1 UDP Characteristics &amp; 8-Byte Header Structure</a:t>
+              <a:t>2.1.2.1 UDP Protocol Architecture &amp; 8-Byte Header</a:t>
             </a:r>
           </a:p>
         </p:txBody>
@@ -3437,7 +3576,7 @@
               </a:defRPr>
             </a:pPr>
             <a:r>
-              <a:t>M2.1.2 UDP PROTOCOL</a:t>
+              <a:t>M2.1.2 UDP ARCHITECTURE</a:t>
             </a:r>
           </a:p>
         </p:txBody>
@@ -3450,7 +3589,7 @@
         </p:nvSpPr>
         <p:spPr>
           <a:xfrm>
-            <a:off x="731520" y="1280160"/>
+            <a:off x="731520" y="1234440"/>
             <a:ext cx="6858000" cy="4937760"/>
           </a:xfrm>
           <a:prstGeom prst="rect">
@@ -3468,29 +3607,29 @@
               <a:spcAft>
                 <a:spcPts val="200"/>
               </a:spcAft>
-              <a:defRPr b="1" sz="1500">
+              <a:defRPr b="1" sz="1450">
                 <a:solidFill>
                   <a:srgbClr val="0F1E4A"/>
                 </a:solidFill>
               </a:defRPr>
             </a:pPr>
             <a:r>
-              <a:t>• Core Characteristics</a:t>
+              <a:t>• UDP Characteristics (RFC 768)</a:t>
             </a:r>
           </a:p>
           <a:p>
             <a:pPr>
               <a:spcAft>
-                <a:spcPts val="800"/>
+                <a:spcPts val="700"/>
               </a:spcAft>
-              <a:defRPr sz="1300">
-                <a:solidFill>
-                  <a:srgbClr val="1E293B"/>
-                </a:solidFill>
-              </a:defRPr>
-            </a:pPr>
-            <a:r>
-              <a:t>   Connectionless, unreliable, best-effort message-oriented service. No handshaking delay, no congestion control throttling, minimal header overhead.</a:t>
+              <a:defRPr sz="1250">
+                <a:solidFill>
+                  <a:srgbClr val="0F172A"/>
+                </a:solidFill>
+              </a:defRPr>
+            </a:pPr>
+            <a:r>
+              <a:t>   Connectionless, unreliable, lightweight, message-oriented transport protocol. Provides bare minimum services: process multiplexing and optional error checking.</a:t>
             </a:r>
           </a:p>
           <a:p>
@@ -3498,29 +3637,29 @@
               <a:spcAft>
                 <a:spcPts val="200"/>
               </a:spcAft>
-              <a:defRPr b="1" sz="1500">
+              <a:defRPr b="1" sz="1450">
                 <a:solidFill>
                   <a:srgbClr val="0F1E4A"/>
                 </a:solidFill>
               </a:defRPr>
             </a:pPr>
             <a:r>
-              <a:t>• Source Port (16 bits)</a:t>
+              <a:t>• Why Use UDP?</a:t>
             </a:r>
           </a:p>
           <a:p>
             <a:pPr>
               <a:spcAft>
-                <a:spcPts val="800"/>
+                <a:spcPts val="700"/>
               </a:spcAft>
-              <a:defRPr sz="1300">
-                <a:solidFill>
-                  <a:srgbClr val="1E293B"/>
-                </a:solidFill>
-              </a:defRPr>
-            </a:pPr>
-            <a:r>
-              <a:t>   Identifies sending process (optional; set to 0 if no reply expected).</a:t>
+              <a:defRPr sz="1250">
+                <a:solidFill>
+                  <a:srgbClr val="0F172A"/>
+                </a:solidFill>
+              </a:defRPr>
+            </a:pPr>
+            <a:r>
+              <a:t>   1. No connection establishment delay (0-RTT), 2. No connection state at server, 3. Small header overhead (8 bytes vs TCP 20 bytes), 4. Unregulated send rate (no congestion throttling).</a:t>
             </a:r>
           </a:p>
           <a:p>
@@ -3528,29 +3667,29 @@
               <a:spcAft>
                 <a:spcPts val="200"/>
               </a:spcAft>
-              <a:defRPr b="1" sz="1500">
+              <a:defRPr b="1" sz="1450">
                 <a:solidFill>
                   <a:srgbClr val="0F1E4A"/>
                 </a:solidFill>
               </a:defRPr>
             </a:pPr>
             <a:r>
-              <a:t>• Destination Port (16 bits)</a:t>
+              <a:t>• UDP 8-Byte Header Format (32-bit width)</a:t>
             </a:r>
           </a:p>
           <a:p>
             <a:pPr>
               <a:spcAft>
-                <a:spcPts val="800"/>
+                <a:spcPts val="700"/>
               </a:spcAft>
-              <a:defRPr sz="1300">
-                <a:solidFill>
-                  <a:srgbClr val="1E293B"/>
-                </a:solidFill>
-              </a:defRPr>
-            </a:pPr>
-            <a:r>
-              <a:t>   Identifies receiving application process on target host.</a:t>
+              <a:defRPr sz="1250">
+                <a:solidFill>
+                  <a:srgbClr val="0F172A"/>
+                </a:solidFill>
+              </a:defRPr>
+            </a:pPr>
+            <a:r>
+              <a:t>   Source Port (16 bits) | Destination Port (16 bits) \n Length (16 bits, header + payload in bytes) | Checksum (16 bits).</a:t>
             </a:r>
           </a:p>
           <a:p>
@@ -3558,59 +3697,29 @@
               <a:spcAft>
                 <a:spcPts val="200"/>
               </a:spcAft>
-              <a:defRPr b="1" sz="1500">
+              <a:defRPr b="1" sz="1450">
                 <a:solidFill>
                   <a:srgbClr val="0F1E4A"/>
                 </a:solidFill>
               </a:defRPr>
             </a:pPr>
             <a:r>
-              <a:t>• Length (16 bits)</a:t>
+              <a:t>• Message Boundary Preservation</a:t>
             </a:r>
           </a:p>
           <a:p>
             <a:pPr>
               <a:spcAft>
-                <a:spcPts val="800"/>
+                <a:spcPts val="700"/>
               </a:spcAft>
-              <a:defRPr sz="1300">
-                <a:solidFill>
-                  <a:srgbClr val="1E293B"/>
-                </a:solidFill>
-              </a:defRPr>
-            </a:pPr>
-            <a:r>
-              <a:t>   Total length of UDP datagram in bytes (Header [8 bytes] + Payload). Minimum value is 8 bytes.</a:t>
-            </a:r>
-          </a:p>
-          <a:p>
-            <a:pPr>
-              <a:spcAft>
-                <a:spcPts val="200"/>
-              </a:spcAft>
-              <a:defRPr b="1" sz="1500">
-                <a:solidFill>
-                  <a:srgbClr val="0F1E4A"/>
-                </a:solidFill>
-              </a:defRPr>
-            </a:pPr>
-            <a:r>
-              <a:t>• Checksum (16 bits)</a:t>
-            </a:r>
-          </a:p>
-          <a:p>
-            <a:pPr>
-              <a:spcAft>
-                <a:spcPts val="800"/>
-              </a:spcAft>
-              <a:defRPr sz="1300">
-                <a:solidFill>
-                  <a:srgbClr val="1E293B"/>
-                </a:solidFill>
-              </a:defRPr>
-            </a:pPr>
-            <a:r>
-              <a:t>   Used for error detection across pseudo-header, UDP header, and payload. Optional in IPv4 (0 if unused), mandatory in IPv6.</a:t>
+              <a:defRPr sz="1250">
+                <a:solidFill>
+                  <a:srgbClr val="0F172A"/>
+                </a:solidFill>
+              </a:defRPr>
+            </a:pPr>
+            <a:r>
+              <a:t>   UDP sends data in discrete datagrams. If sender writes 500 bytes twice, receiver reads 500 bytes twice (preserves message boundaries, unlike TCP byte stream).</a:t>
             </a:r>
           </a:p>
         </p:txBody>
@@ -3623,14 +3732,14 @@
         </p:nvSpPr>
         <p:spPr>
           <a:xfrm>
-            <a:off x="7955279" y="1280160"/>
-            <a:ext cx="3566160" cy="4846320"/>
+            <a:off x="7955279" y="1234440"/>
+            <a:ext cx="3566160" cy="4892040"/>
           </a:xfrm>
           <a:prstGeom prst="roundRect">
             <a:avLst/>
           </a:prstGeom>
           <a:solidFill>
-            <a:srgbClr val="F1F5F9"/>
+            <a:srgbClr val="F8FAFC"/>
           </a:solidFill>
           <a:ln w="19050">
             <a:solidFill>
@@ -3668,7 +3777,7 @@
         </p:nvSpPr>
         <p:spPr>
           <a:xfrm>
-            <a:off x="8138160" y="1417320"/>
+            <a:off x="8138160" y="1371600"/>
             <a:ext cx="3200400" cy="4572000"/>
           </a:xfrm>
           <a:prstGeom prst="rect">
@@ -3693,7 +3802,7 @@
               </a:defRPr>
             </a:pPr>
             <a:r>
-              <a:t>UDP Header (8 Bytes)</a:t>
+              <a:t>Header Breakdown</a:t>
             </a:r>
           </a:p>
           <a:p>
@@ -3703,12 +3812,12 @@
               </a:spcAft>
               <a:defRPr sz="1200">
                 <a:solidFill>
-                  <a:srgbClr val="1E293B"/>
-                </a:solidFill>
-              </a:defRPr>
-            </a:pPr>
-            <a:r>
-              <a:t>→ 0-15: Source Port (16b)</a:t>
+                  <a:srgbClr val="0F172A"/>
+                </a:solidFill>
+              </a:defRPr>
+            </a:pPr>
+            <a:r>
+              <a:t>→ Source Port: 16 bits</a:t>
             </a:r>
           </a:p>
           <a:p>
@@ -3718,12 +3827,12 @@
               </a:spcAft>
               <a:defRPr sz="1200">
                 <a:solidFill>
-                  <a:srgbClr val="1E293B"/>
-                </a:solidFill>
-              </a:defRPr>
-            </a:pPr>
-            <a:r>
-              <a:t>→ 16-31: Destination Port (16b)</a:t>
+                  <a:srgbClr val="0F172A"/>
+                </a:solidFill>
+              </a:defRPr>
+            </a:pPr>
+            <a:r>
+              <a:t>→ Destination Port: 16 bits</a:t>
             </a:r>
           </a:p>
           <a:p>
@@ -3733,12 +3842,12 @@
               </a:spcAft>
               <a:defRPr sz="1200">
                 <a:solidFill>
-                  <a:srgbClr val="1E293B"/>
-                </a:solidFill>
-              </a:defRPr>
-            </a:pPr>
-            <a:r>
-              <a:t>→ 32-47: Total Length (16b)</a:t>
+                  <a:srgbClr val="0F172A"/>
+                </a:solidFill>
+              </a:defRPr>
+            </a:pPr>
+            <a:r>
+              <a:t>→ Length: 16 bits (Min 8 B)</a:t>
             </a:r>
           </a:p>
           <a:p>
@@ -3748,12 +3857,12 @@
               </a:spcAft>
               <a:defRPr sz="1200">
                 <a:solidFill>
-                  <a:srgbClr val="1E293B"/>
-                </a:solidFill>
-              </a:defRPr>
-            </a:pPr>
-            <a:r>
-              <a:t>→ 48-63: Checksum (16b)</a:t>
+                  <a:srgbClr val="0F172A"/>
+                </a:solidFill>
+              </a:defRPr>
+            </a:pPr>
+            <a:r>
+              <a:t>→ Checksum: 16 bits</a:t>
             </a:r>
           </a:p>
           <a:p>
@@ -3763,12 +3872,12 @@
               </a:spcAft>
               <a:defRPr sz="1200">
                 <a:solidFill>
-                  <a:srgbClr val="1E293B"/>
-                </a:solidFill>
-              </a:defRPr>
-            </a:pPr>
-            <a:r>
-              <a:t>→ Followed immediately by Payload</a:t>
+                  <a:srgbClr val="0F172A"/>
+                </a:solidFill>
+              </a:defRPr>
+            </a:pPr>
+            <a:r>
+              <a:t>→ Total Header: Exactly 8 Bytes</a:t>
             </a:r>
           </a:p>
         </p:txBody>
@@ -3781,8 +3890,8 @@
         </p:nvSpPr>
         <p:spPr>
           <a:xfrm>
-            <a:off x="731520" y="6309360"/>
-            <a:ext cx="10789920" cy="365760"/>
+            <a:off x="731520" y="6327648"/>
+            <a:ext cx="10789920" cy="320040"/>
           </a:xfrm>
           <a:prstGeom prst="rect">
             <a:avLst/>
@@ -3804,6 +3913,41 @@
             </a:pPr>
             <a:r>
               <a:t>PCCST501 Computer Networks | KTU 2024 Scheme | Prof. Anju Markose | Assistant Professor, Dept. of CSE | VJCET</a:t>
+            </a:r>
+          </a:p>
+        </p:txBody>
+      </p:sp>
+      <p:sp>
+        <p:nvSpPr>
+          <p:cNvPr id="10" name="TextBox 9"/>
+          <p:cNvSpPr txBox="1"/>
+          <p:nvPr/>
+        </p:nvSpPr>
+        <p:spPr>
+          <a:xfrm>
+            <a:off x="6858000" y="6327648"/>
+            <a:ext cx="4572000" cy="320040"/>
+          </a:xfrm>
+          <a:prstGeom prst="rect">
+            <a:avLst/>
+          </a:prstGeom>
+          <a:noFill/>
+        </p:spPr>
+        <p:txBody>
+          <a:bodyPr wrap="none">
+            <a:spAutoFit/>
+          </a:bodyPr>
+          <a:lstStyle/>
+          <a:p>
+            <a:pPr algn="r">
+              <a:defRPr sz="950">
+                <a:solidFill>
+                  <a:srgbClr val="64748B"/>
+                </a:solidFill>
+              </a:defRPr>
+            </a:pPr>
+            <a:r>
+              <a:t>Dept. of CSE, VJCET</a:t>
             </a:r>
           </a:p>
         </p:txBody>
@@ -3935,14 +4079,14 @@
           <a:lstStyle/>
           <a:p>
             <a:pPr>
-              <a:defRPr b="1" sz="2300">
+              <a:defRPr b="1" sz="2200">
                 <a:solidFill>
                   <a:srgbClr val="F8FAFC"/>
                 </a:solidFill>
               </a:defRPr>
             </a:pPr>
             <a:r>
-              <a:t>2.1.2.2 UDP Checksum Calculation with Pseudo-Header</a:t>
+              <a:t>2.1.2.2 UDP 16-Bit 1's Complement Checksum Calculation</a:t>
             </a:r>
           </a:p>
         </p:txBody>
@@ -3977,204 +4121,31 @@
               </a:defRPr>
             </a:pPr>
             <a:r>
-              <a:t>M2.1.2 UDP CHECKSUM</a:t>
-            </a:r>
-          </a:p>
-        </p:txBody>
-      </p:sp>
-      <p:sp>
-        <p:nvSpPr>
-          <p:cNvPr id="6" name="TextBox 5"/>
-          <p:cNvSpPr txBox="1"/>
-          <p:nvPr/>
-        </p:nvSpPr>
-        <p:spPr>
-          <a:xfrm>
-            <a:off x="731520" y="1280160"/>
-            <a:ext cx="6858000" cy="4937760"/>
-          </a:xfrm>
-          <a:prstGeom prst="rect">
-            <a:avLst/>
-          </a:prstGeom>
-          <a:noFill/>
-        </p:spPr>
-        <p:txBody>
-          <a:bodyPr wrap="square">
-            <a:spAutoFit/>
-          </a:bodyPr>
-          <a:lstStyle/>
-          <a:p>
-            <a:pPr>
-              <a:spcAft>
-                <a:spcPts val="200"/>
-              </a:spcAft>
-              <a:defRPr b="1" sz="1500">
-                <a:solidFill>
-                  <a:srgbClr val="0F1E4A"/>
-                </a:solidFill>
-              </a:defRPr>
-            </a:pPr>
-            <a:r>
-              <a:t>• The Pseudo-Header Concept</a:t>
-            </a:r>
-          </a:p>
-          <a:p>
-            <a:pPr>
-              <a:spcAft>
-                <a:spcPts val="800"/>
-              </a:spcAft>
-              <a:defRPr sz="1300">
-                <a:solidFill>
-                  <a:srgbClr val="1E293B"/>
-                </a:solidFill>
-              </a:defRPr>
-            </a:pPr>
-            <a:r>
-              <a:t>   To detect misrouted packets, UDP computes checksum over a 12-byte temporary IP Pseudo-Header + 8-byte UDP header + payload.</a:t>
-            </a:r>
-          </a:p>
-          <a:p>
-            <a:pPr>
-              <a:spcAft>
-                <a:spcPts val="200"/>
-              </a:spcAft>
-              <a:defRPr b="1" sz="1500">
-                <a:solidFill>
-                  <a:srgbClr val="0F1E4A"/>
-                </a:solidFill>
-              </a:defRPr>
-            </a:pPr>
-            <a:r>
-              <a:t>• Pseudo-Header Fields</a:t>
-            </a:r>
-          </a:p>
-          <a:p>
-            <a:pPr>
-              <a:spcAft>
-                <a:spcPts val="800"/>
-              </a:spcAft>
-              <a:defRPr sz="1300">
-                <a:solidFill>
-                  <a:srgbClr val="1E293B"/>
-                </a:solidFill>
-              </a:defRPr>
-            </a:pPr>
-            <a:r>
-              <a:t>   Source IP (32b), Destination IP (32b), All Zeros (8b), Protocol Number (8b: `17` for UDP), UDP Length (16b).</a:t>
-            </a:r>
-          </a:p>
-          <a:p>
-            <a:pPr>
-              <a:spcAft>
-                <a:spcPts val="200"/>
-              </a:spcAft>
-              <a:defRPr b="1" sz="1500">
-                <a:solidFill>
-                  <a:srgbClr val="0F1E4A"/>
-                </a:solidFill>
-              </a:defRPr>
-            </a:pPr>
-            <a:r>
-              <a:t>• 1's Complement Addition Algorithm</a:t>
-            </a:r>
-          </a:p>
-          <a:p>
-            <a:pPr>
-              <a:spcAft>
-                <a:spcPts val="800"/>
-              </a:spcAft>
-              <a:defRPr sz="1300">
-                <a:solidFill>
-                  <a:srgbClr val="1E293B"/>
-                </a:solidFill>
-              </a:defRPr>
-            </a:pPr>
-            <a:r>
-              <a:t>   Data divided into 16-bit words. All 16-bit words are added together using 1's complement arithmetic (any carry-out bit is wrapped around and added back to LSB).</a:t>
-            </a:r>
-          </a:p>
-          <a:p>
-            <a:pPr>
-              <a:spcAft>
-                <a:spcPts val="200"/>
-              </a:spcAft>
-              <a:defRPr b="1" sz="1500">
-                <a:solidFill>
-                  <a:srgbClr val="0F1E4A"/>
-                </a:solidFill>
-              </a:defRPr>
-            </a:pPr>
-            <a:r>
-              <a:t>• Checksum Inversion</a:t>
-            </a:r>
-          </a:p>
-          <a:p>
-            <a:pPr>
-              <a:spcAft>
-                <a:spcPts val="800"/>
-              </a:spcAft>
-              <a:defRPr sz="1300">
-                <a:solidFill>
-                  <a:srgbClr val="1E293B"/>
-                </a:solidFill>
-              </a:defRPr>
-            </a:pPr>
-            <a:r>
-              <a:t>   The bitwise NOT (1's complement inverse) of the final sum is placed into the Checksum field.</a:t>
-            </a:r>
-          </a:p>
-          <a:p>
-            <a:pPr>
-              <a:spcAft>
-                <a:spcPts val="200"/>
-              </a:spcAft>
-              <a:defRPr b="1" sz="1500">
-                <a:solidFill>
-                  <a:srgbClr val="0F1E4A"/>
-                </a:solidFill>
-              </a:defRPr>
-            </a:pPr>
-            <a:r>
-              <a:t>• Receiver Verification</a:t>
-            </a:r>
-          </a:p>
-          <a:p>
-            <a:pPr>
-              <a:spcAft>
-                <a:spcPts val="800"/>
-              </a:spcAft>
-              <a:defRPr sz="1300">
-                <a:solidFill>
-                  <a:srgbClr val="1E293B"/>
-                </a:solidFill>
-              </a:defRPr>
-            </a:pPr>
-            <a:r>
-              <a:t>   Receiver sums all 16-bit words (including the checksum). If no errors occurred, the resulting 16-bit sum MUST be all 1s (`0xFFFF`).</a:t>
-            </a:r>
-          </a:p>
-        </p:txBody>
-      </p:sp>
-      <p:sp>
-        <p:nvSpPr>
-          <p:cNvPr id="7" name="Rounded Rectangle 6"/>
+              <a:t>M2.1.2 CHECKSUM CALCULATION</a:t>
+            </a:r>
+          </a:p>
+        </p:txBody>
+      </p:sp>
+      <p:sp>
+        <p:nvSpPr>
+          <p:cNvPr id="6" name="Rounded Rectangle 5"/>
           <p:cNvSpPr/>
           <p:nvPr/>
         </p:nvSpPr>
         <p:spPr>
           <a:xfrm>
-            <a:off x="7955279" y="1280160"/>
-            <a:ext cx="3566160" cy="4846320"/>
+            <a:off x="731520" y="1234440"/>
+            <a:ext cx="5486400" cy="4892040"/>
           </a:xfrm>
           <a:prstGeom prst="roundRect">
             <a:avLst/>
           </a:prstGeom>
           <a:solidFill>
-            <a:srgbClr val="F1F5F9"/>
+            <a:srgbClr val="F8FAFC"/>
           </a:solidFill>
           <a:ln w="19050">
             <a:solidFill>
-              <a:srgbClr val="0E7490"/>
+              <a:srgbClr val="0F1E4A"/>
             </a:solidFill>
           </a:ln>
         </p:spPr>
@@ -4202,14 +4173,14 @@
       </p:sp>
       <p:sp>
         <p:nvSpPr>
-          <p:cNvPr id="8" name="TextBox 7"/>
+          <p:cNvPr id="7" name="TextBox 6"/>
           <p:cNvSpPr txBox="1"/>
           <p:nvPr/>
         </p:nvSpPr>
         <p:spPr>
           <a:xfrm>
-            <a:off x="8138160" y="1417320"/>
-            <a:ext cx="3200400" cy="4572000"/>
+            <a:off x="914400" y="1371600"/>
+            <a:ext cx="5120640" cy="4572000"/>
           </a:xfrm>
           <a:prstGeom prst="rect">
             <a:avLst/>
@@ -4224,16 +4195,746 @@
           <a:p>
             <a:pPr>
               <a:spcAft>
+                <a:spcPts val="800"/>
+              </a:spcAft>
+              <a:defRPr b="1" sz="1450">
+                <a:solidFill>
+                  <a:srgbClr val="0F1E4A"/>
+                </a:solidFill>
+              </a:defRPr>
+            </a:pPr>
+            <a:r>
+              <a:t>📌 KTU Numerical Problem Statement</a:t>
+            </a:r>
+          </a:p>
+          <a:p>
+            <a:pPr>
+              <a:spcAft>
+                <a:spcPts val="1400"/>
+              </a:spcAft>
+              <a:defRPr sz="1250">
+                <a:solidFill>
+                  <a:srgbClr val="0F172A"/>
+                </a:solidFill>
+              </a:defRPr>
+            </a:pPr>
+            <a:r>
+              <a:t>Compute the UDP checksum for three 16-bit words: Word 1 = 0x66B4 (0110 0110 1011 0100), Word 2 = 0x5555 (0101 0101 0101 0101), Word 3 = 0x8F0C (1000 1111 0000 1100). Show wraparound carry addition and 1's complement inversion. Also explain how the receiver verifies checksum integrity.</a:t>
+            </a:r>
+          </a:p>
+          <a:p>
+            <a:pPr>
+              <a:spcAft>
+                <a:spcPts val="600"/>
+              </a:spcAft>
+              <a:defRPr b="1" sz="1350">
+                <a:solidFill>
+                  <a:srgbClr val="0E7490"/>
+                </a:solidFill>
+              </a:defRPr>
+            </a:pPr>
+            <a:r>
+              <a:t>📐 Governing Formulas &amp; Principles:</a:t>
+            </a:r>
+          </a:p>
+          <a:p>
+            <a:pPr>
+              <a:spcAft>
+                <a:spcPts val="400"/>
+              </a:spcAft>
+              <a:defRPr sz="1200">
+                <a:solidFill>
+                  <a:srgbClr val="0F172A"/>
+                </a:solidFill>
+              </a:defRPr>
+            </a:pPr>
+            <a:r>
+              <a:t>• Step 1: Sum 16-bit words using standard binary addition.</a:t>
+            </a:r>
+          </a:p>
+          <a:p>
+            <a:pPr>
+              <a:spcAft>
+                <a:spcPts val="400"/>
+              </a:spcAft>
+              <a:defRPr sz="1200">
+                <a:solidFill>
+                  <a:srgbClr val="0F172A"/>
+                </a:solidFill>
+              </a:defRPr>
+            </a:pPr>
+            <a:r>
+              <a:t>• Step 2: If sum produces a 17th bit (carry overflow), wrap it around and add to the least significant bit.</a:t>
+            </a:r>
+          </a:p>
+          <a:p>
+            <a:pPr>
+              <a:spcAft>
+                <a:spcPts val="400"/>
+              </a:spcAft>
+              <a:defRPr sz="1200">
+                <a:solidFill>
+                  <a:srgbClr val="0F172A"/>
+                </a:solidFill>
+              </a:defRPr>
+            </a:pPr>
+            <a:r>
+              <a:t>• Step 3: Invert all bits (1's complement) to obtain the transmitted Checksum field.</a:t>
+            </a:r>
+          </a:p>
+          <a:p>
+            <a:pPr>
+              <a:spcAft>
+                <a:spcPts val="400"/>
+              </a:spcAft>
+              <a:defRPr sz="1200">
+                <a:solidFill>
+                  <a:srgbClr val="0F172A"/>
+                </a:solidFill>
+              </a:defRPr>
+            </a:pPr>
+            <a:r>
+              <a:t>• Receiver: Sums all received words including Checksum; valid result must be 0xFFFF (all 1s).</a:t>
+            </a:r>
+          </a:p>
+        </p:txBody>
+      </p:sp>
+      <p:sp>
+        <p:nvSpPr>
+          <p:cNvPr id="8" name="Rounded Rectangle 7"/>
+          <p:cNvSpPr/>
+          <p:nvPr/>
+        </p:nvSpPr>
+        <p:spPr>
+          <a:xfrm>
+            <a:off x="6492240" y="1234440"/>
+            <a:ext cx="5029200" cy="4892040"/>
+          </a:xfrm>
+          <a:prstGeom prst="roundRect">
+            <a:avLst/>
+          </a:prstGeom>
+          <a:solidFill>
+            <a:srgbClr val="ECFDF5"/>
+          </a:solidFill>
+          <a:ln w="19050">
+            <a:solidFill>
+              <a:srgbClr val="10B981"/>
+            </a:solidFill>
+          </a:ln>
+        </p:spPr>
+        <p:style>
+          <a:lnRef idx="1">
+            <a:schemeClr val="accent1"/>
+          </a:lnRef>
+          <a:fillRef idx="3">
+            <a:schemeClr val="accent1"/>
+          </a:fillRef>
+          <a:effectRef idx="2">
+            <a:schemeClr val="accent1"/>
+          </a:effectRef>
+          <a:fontRef idx="minor">
+            <a:schemeClr val="lt1"/>
+          </a:fontRef>
+        </p:style>
+        <p:txBody>
+          <a:bodyPr rtlCol="0" anchor="ctr"/>
+          <a:lstStyle/>
+          <a:p>
+            <a:pPr algn="ctr"/>
+          </a:p>
+        </p:txBody>
+      </p:sp>
+      <p:sp>
+        <p:nvSpPr>
+          <p:cNvPr id="9" name="TextBox 8"/>
+          <p:cNvSpPr txBox="1"/>
+          <p:nvPr/>
+        </p:nvSpPr>
+        <p:spPr>
+          <a:xfrm>
+            <a:off x="6675120" y="1371600"/>
+            <a:ext cx="4663440" cy="4572000"/>
+          </a:xfrm>
+          <a:prstGeom prst="rect">
+            <a:avLst/>
+          </a:prstGeom>
+          <a:noFill/>
+        </p:spPr>
+        <p:txBody>
+          <a:bodyPr wrap="square">
+            <a:spAutoFit/>
+          </a:bodyPr>
+          <a:lstStyle/>
+          <a:p>
+            <a:pPr>
+              <a:spcAft>
+                <a:spcPts val="800"/>
+              </a:spcAft>
+              <a:defRPr b="1" sz="1450">
+                <a:solidFill>
+                  <a:srgbClr val="047857"/>
+                </a:solidFill>
+              </a:defRPr>
+            </a:pPr>
+            <a:r>
+              <a:t>📝 Step-by-Step Derivation &amp; Solution</a:t>
+            </a:r>
+          </a:p>
+          <a:p>
+            <a:pPr>
+              <a:spcAft>
+                <a:spcPts val="500"/>
+              </a:spcAft>
+              <a:defRPr sz="1200">
+                <a:solidFill>
+                  <a:srgbClr val="0F172A"/>
+                </a:solidFill>
+              </a:defRPr>
+            </a:pPr>
+            <a:r>
+              <a:t>Step 1: Sum Word 1 + Word 2: 0x66B4 + 0x5555 = 0xBC09 (1011 1100 0000 1001)</a:t>
+            </a:r>
+          </a:p>
+          <a:p>
+            <a:pPr>
+              <a:spcAft>
+                <a:spcPts val="500"/>
+              </a:spcAft>
+              <a:defRPr sz="1200">
+                <a:solidFill>
+                  <a:srgbClr val="0F172A"/>
+                </a:solidFill>
+              </a:defRPr>
+            </a:pPr>
+            <a:r>
+              <a:t>Step 2: Add Word 3: 0xBC09 + 0x8F0C = 0x14B15 (1 0100 1011 0001 0101 - Carry generated!)</a:t>
+            </a:r>
+          </a:p>
+          <a:p>
+            <a:pPr>
+              <a:spcAft>
+                <a:spcPts val="500"/>
+              </a:spcAft>
+              <a:defRPr sz="1200">
+                <a:solidFill>
+                  <a:srgbClr val="0F172A"/>
+                </a:solidFill>
+              </a:defRPr>
+            </a:pPr>
+            <a:r>
+              <a:t>Step 3: Wrap carry around: 0x4B15 + 1 = 0x4B16 (0100 1011 0001 0110)</a:t>
+            </a:r>
+          </a:p>
+          <a:p>
+            <a:pPr>
+              <a:spcAft>
+                <a:spcPts val="500"/>
+              </a:spcAft>
+              <a:defRPr sz="1200">
+                <a:solidFill>
+                  <a:srgbClr val="0F172A"/>
+                </a:solidFill>
+              </a:defRPr>
+            </a:pPr>
+            <a:r>
+              <a:t>Step 4: Take 1's complement (~0x4B16): 1011 0100 1110 1001 = 0xB4E9 (Checksum transmitted)</a:t>
+            </a:r>
+          </a:p>
+          <a:p>
+            <a:pPr>
+              <a:spcAft>
+                <a:spcPts val="500"/>
+              </a:spcAft>
+              <a:defRPr sz="1200">
+                <a:solidFill>
+                  <a:srgbClr val="0F172A"/>
+                </a:solidFill>
+              </a:defRPr>
+            </a:pPr>
+            <a:r>
+              <a:t>Step 5: Receiver Verification: 0x4B16 + 0xB4E9 = 0xFFFF (1111 1111 1111 1111 -&gt; Verified Valid!)</a:t>
+            </a:r>
+          </a:p>
+          <a:p>
+            <a:pPr>
+              <a:spcAft>
+                <a:spcPts val="800"/>
+              </a:spcAft>
+              <a:defRPr b="1" sz="1300">
+                <a:solidFill>
+                  <a:srgbClr val="047857"/>
+                </a:solidFill>
+              </a:defRPr>
+            </a:pPr>
+            <a:r>
+              <a:t>✅ FINAL ANSWER: Transmitted Checksum = 0xB4E9 | Receiver sum = 0xFFFF</a:t>
+            </a:r>
+          </a:p>
+          <a:p>
+            <a:pPr>
+              <a:defRPr sz="1100">
+                <a:solidFill>
+                  <a:srgbClr val="64748B"/>
+                </a:solidFill>
+              </a:defRPr>
+            </a:pPr>
+            <a:r>
+              <a:t>💡 Exam Tip: Note: UDP includes an IP Pseudo-Header (Source IP, Dest IP, Protocol 17, UDP Length) in checksum calculation to detect misrouted packets.</a:t>
+            </a:r>
+          </a:p>
+        </p:txBody>
+      </p:sp>
+      <p:sp>
+        <p:nvSpPr>
+          <p:cNvPr id="10" name="TextBox 9"/>
+          <p:cNvSpPr txBox="1"/>
+          <p:nvPr/>
+        </p:nvSpPr>
+        <p:spPr>
+          <a:xfrm>
+            <a:off x="731520" y="6327648"/>
+            <a:ext cx="10789920" cy="320040"/>
+          </a:xfrm>
+          <a:prstGeom prst="rect">
+            <a:avLst/>
+          </a:prstGeom>
+          <a:noFill/>
+        </p:spPr>
+        <p:txBody>
+          <a:bodyPr wrap="none">
+            <a:spAutoFit/>
+          </a:bodyPr>
+          <a:lstStyle/>
+          <a:p>
+            <a:pPr>
+              <a:defRPr sz="950">
+                <a:solidFill>
+                  <a:srgbClr val="64748B"/>
+                </a:solidFill>
+              </a:defRPr>
+            </a:pPr>
+            <a:r>
+              <a:t>PCCST501 Computer Networks | KTU 2024 Scheme | Prof. Anju Markose | Assistant Professor, Dept. of CSE | VJCET</a:t>
+            </a:r>
+          </a:p>
+        </p:txBody>
+      </p:sp>
+      <p:sp>
+        <p:nvSpPr>
+          <p:cNvPr id="11" name="TextBox 10"/>
+          <p:cNvSpPr txBox="1"/>
+          <p:nvPr/>
+        </p:nvSpPr>
+        <p:spPr>
+          <a:xfrm>
+            <a:off x="6858000" y="6327648"/>
+            <a:ext cx="4572000" cy="320040"/>
+          </a:xfrm>
+          <a:prstGeom prst="rect">
+            <a:avLst/>
+          </a:prstGeom>
+          <a:noFill/>
+        </p:spPr>
+        <p:txBody>
+          <a:bodyPr wrap="none">
+            <a:spAutoFit/>
+          </a:bodyPr>
+          <a:lstStyle/>
+          <a:p>
+            <a:pPr algn="r">
+              <a:defRPr sz="950">
+                <a:solidFill>
+                  <a:srgbClr val="64748B"/>
+                </a:solidFill>
+              </a:defRPr>
+            </a:pPr>
+            <a:r>
+              <a:t>Dept. of CSE, VJCET</a:t>
+            </a:r>
+          </a:p>
+        </p:txBody>
+      </p:sp>
+    </p:spTree>
+  </p:cSld>
+  <p:clrMapOvr>
+    <a:masterClrMapping/>
+  </p:clrMapOvr>
+</p:sld>
+</file>
+
+<file path=ppt/slides/slide4.xml><?xml version="1.0" encoding="utf-8"?>
+<p:sld xmlns:a="http://schemas.openxmlformats.org/drawingml/2006/main" xmlns:p="http://schemas.openxmlformats.org/presentationml/2006/main" xmlns:r="http://schemas.openxmlformats.org/officeDocument/2006/relationships">
+  <p:cSld>
+    <p:spTree>
+      <p:nvGrpSpPr>
+        <p:cNvPr id="1" name=""/>
+        <p:cNvGrpSpPr/>
+        <p:nvPr/>
+      </p:nvGrpSpPr>
+      <p:grpSpPr/>
+      <p:sp>
+        <p:nvSpPr>
+          <p:cNvPr id="2" name="Rectangle 1"/>
+          <p:cNvSpPr/>
+          <p:nvPr/>
+        </p:nvSpPr>
+        <p:spPr>
+          <a:xfrm>
+            <a:off x="0" y="0"/>
+            <a:ext cx="12191695" cy="1005840"/>
+          </a:xfrm>
+          <a:prstGeom prst="rect">
+            <a:avLst/>
+          </a:prstGeom>
+          <a:solidFill>
+            <a:srgbClr val="0F1E4A"/>
+          </a:solidFill>
+          <a:ln>
+            <a:noFill/>
+          </a:ln>
+        </p:spPr>
+        <p:style>
+          <a:lnRef idx="1">
+            <a:schemeClr val="accent1"/>
+          </a:lnRef>
+          <a:fillRef idx="3">
+            <a:schemeClr val="accent1"/>
+          </a:fillRef>
+          <a:effectRef idx="2">
+            <a:schemeClr val="accent1"/>
+          </a:effectRef>
+          <a:fontRef idx="minor">
+            <a:schemeClr val="lt1"/>
+          </a:fontRef>
+        </p:style>
+        <p:txBody>
+          <a:bodyPr rtlCol="0" anchor="ctr"/>
+          <a:lstStyle/>
+          <a:p>
+            <a:pPr algn="ctr"/>
+          </a:p>
+        </p:txBody>
+      </p:sp>
+      <p:sp>
+        <p:nvSpPr>
+          <p:cNvPr id="3" name="Rectangle 2"/>
+          <p:cNvSpPr/>
+          <p:nvPr/>
+        </p:nvSpPr>
+        <p:spPr>
+          <a:xfrm>
+            <a:off x="0" y="969264"/>
+            <a:ext cx="12191695" cy="36576"/>
+          </a:xfrm>
+          <a:prstGeom prst="rect">
+            <a:avLst/>
+          </a:prstGeom>
+          <a:solidFill>
+            <a:srgbClr val="D97706"/>
+          </a:solidFill>
+          <a:ln>
+            <a:noFill/>
+          </a:ln>
+        </p:spPr>
+        <p:style>
+          <a:lnRef idx="1">
+            <a:schemeClr val="accent1"/>
+          </a:lnRef>
+          <a:fillRef idx="3">
+            <a:schemeClr val="accent1"/>
+          </a:fillRef>
+          <a:effectRef idx="2">
+            <a:schemeClr val="accent1"/>
+          </a:effectRef>
+          <a:fontRef idx="minor">
+            <a:schemeClr val="lt1"/>
+          </a:fontRef>
+        </p:style>
+        <p:txBody>
+          <a:bodyPr rtlCol="0" anchor="ctr"/>
+          <a:lstStyle/>
+          <a:p>
+            <a:pPr algn="ctr"/>
+          </a:p>
+        </p:txBody>
+      </p:sp>
+      <p:sp>
+        <p:nvSpPr>
+          <p:cNvPr id="4" name="TextBox 3"/>
+          <p:cNvSpPr txBox="1"/>
+          <p:nvPr/>
+        </p:nvSpPr>
+        <p:spPr>
+          <a:xfrm>
+            <a:off x="731520" y="164592"/>
+            <a:ext cx="8412480" cy="685800"/>
+          </a:xfrm>
+          <a:prstGeom prst="rect">
+            <a:avLst/>
+          </a:prstGeom>
+          <a:noFill/>
+        </p:spPr>
+        <p:txBody>
+          <a:bodyPr wrap="none">
+            <a:spAutoFit/>
+          </a:bodyPr>
+          <a:lstStyle/>
+          <a:p>
+            <a:pPr>
+              <a:defRPr b="1" sz="2100">
+                <a:solidFill>
+                  <a:srgbClr val="F8FAFC"/>
+                </a:solidFill>
+              </a:defRPr>
+            </a:pPr>
+            <a:r>
+              <a:t>🎯 Exam Booster &amp; Review: UDP Protocol &amp; Checksum</a:t>
+            </a:r>
+          </a:p>
+        </p:txBody>
+      </p:sp>
+      <p:sp>
+        <p:nvSpPr>
+          <p:cNvPr id="5" name="TextBox 4"/>
+          <p:cNvSpPr txBox="1"/>
+          <p:nvPr/>
+        </p:nvSpPr>
+        <p:spPr>
+          <a:xfrm>
+            <a:off x="8229600" y="164592"/>
+            <a:ext cx="3291840" cy="685800"/>
+          </a:xfrm>
+          <a:prstGeom prst="rect">
+            <a:avLst/>
+          </a:prstGeom>
+          <a:noFill/>
+        </p:spPr>
+        <p:txBody>
+          <a:bodyPr wrap="none">
+            <a:spAutoFit/>
+          </a:bodyPr>
+          <a:lstStyle/>
+          <a:p>
+            <a:pPr algn="r">
+              <a:defRPr b="1" sz="1300">
+                <a:solidFill>
+                  <a:srgbClr val="D97706"/>
+                </a:solidFill>
+              </a:defRPr>
+            </a:pPr>
+            <a:r>
+              <a:t>M2.1.2</a:t>
+            </a:r>
+          </a:p>
+        </p:txBody>
+      </p:sp>
+      <p:sp>
+        <p:nvSpPr>
+          <p:cNvPr id="6" name="Rounded Rectangle 5"/>
+          <p:cNvSpPr/>
+          <p:nvPr/>
+        </p:nvSpPr>
+        <p:spPr>
+          <a:xfrm>
+            <a:off x="731520" y="1234440"/>
+            <a:ext cx="5303520" cy="4892040"/>
+          </a:xfrm>
+          <a:prstGeom prst="roundRect">
+            <a:avLst/>
+          </a:prstGeom>
+          <a:solidFill>
+            <a:srgbClr val="FEF3C7"/>
+          </a:solidFill>
+          <a:ln w="19050">
+            <a:solidFill>
+              <a:srgbClr val="D97706"/>
+            </a:solidFill>
+          </a:ln>
+        </p:spPr>
+        <p:style>
+          <a:lnRef idx="1">
+            <a:schemeClr val="accent1"/>
+          </a:lnRef>
+          <a:fillRef idx="3">
+            <a:schemeClr val="accent1"/>
+          </a:fillRef>
+          <a:effectRef idx="2">
+            <a:schemeClr val="accent1"/>
+          </a:effectRef>
+          <a:fontRef idx="minor">
+            <a:schemeClr val="lt1"/>
+          </a:fontRef>
+        </p:style>
+        <p:txBody>
+          <a:bodyPr rtlCol="0" anchor="ctr"/>
+          <a:lstStyle/>
+          <a:p>
+            <a:pPr algn="ctr"/>
+          </a:p>
+        </p:txBody>
+      </p:sp>
+      <p:sp>
+        <p:nvSpPr>
+          <p:cNvPr id="7" name="TextBox 6"/>
+          <p:cNvSpPr txBox="1"/>
+          <p:nvPr/>
+        </p:nvSpPr>
+        <p:spPr>
+          <a:xfrm>
+            <a:off x="914400" y="1371600"/>
+            <a:ext cx="4937760" cy="4572000"/>
+          </a:xfrm>
+          <a:prstGeom prst="rect">
+            <a:avLst/>
+          </a:prstGeom>
+          <a:noFill/>
+        </p:spPr>
+        <p:txBody>
+          <a:bodyPr wrap="square">
+            <a:spAutoFit/>
+          </a:bodyPr>
+          <a:lstStyle/>
+          <a:p>
+            <a:pPr>
+              <a:spcAft>
                 <a:spcPts val="1000"/>
               </a:spcAft>
-              <a:defRPr b="1" sz="1500">
+              <a:defRPr b="1" sz="1450">
+                <a:solidFill>
+                  <a:srgbClr val="D97706"/>
+                </a:solidFill>
+              </a:defRPr>
+            </a:pPr>
+            <a:r>
+              <a:t>📚 KTU High-Yield Questions (K3 Apply)</a:t>
+            </a:r>
+          </a:p>
+          <a:p>
+            <a:pPr>
+              <a:spcAft>
+                <a:spcPts val="700"/>
+              </a:spcAft>
+              <a:defRPr sz="1200">
+                <a:solidFill>
+                  <a:srgbClr val="0F172A"/>
+                </a:solidFill>
+              </a:defRPr>
+            </a:pPr>
+            <a:r>
+              <a:t>Q: Draw the UDP segment header format and explain all fields. Why is UDP header size fixed at 8 bytes? (6 Marks)</a:t>
+            </a:r>
+          </a:p>
+          <a:p>
+            <a:pPr>
+              <a:spcAft>
+                <a:spcPts val="700"/>
+              </a:spcAft>
+              <a:defRPr sz="1200">
+                <a:solidFill>
+                  <a:srgbClr val="0F172A"/>
+                </a:solidFill>
+              </a:defRPr>
+            </a:pPr>
+            <a:r>
+              <a:t>Q: Explain the step-by-step procedure for computing the UDP 16-bit 1's complement checksum. What is the role of the pseudo-header? (8 Marks)</a:t>
+            </a:r>
+          </a:p>
+          <a:p>
+            <a:pPr>
+              <a:spcAft>
+                <a:spcPts val="700"/>
+              </a:spcAft>
+              <a:defRPr sz="1200">
+                <a:solidFill>
+                  <a:srgbClr val="0F172A"/>
+                </a:solidFill>
+              </a:defRPr>
+            </a:pPr>
+            <a:r>
+              <a:t>Q: Why is UDP preferred over TCP for DNS queries, SNMP, and real-time gaming? (5 Marks)</a:t>
+            </a:r>
+          </a:p>
+        </p:txBody>
+      </p:sp>
+      <p:sp>
+        <p:nvSpPr>
+          <p:cNvPr id="8" name="Rounded Rectangle 7"/>
+          <p:cNvSpPr/>
+          <p:nvPr/>
+        </p:nvSpPr>
+        <p:spPr>
+          <a:xfrm>
+            <a:off x="6309360" y="1234440"/>
+            <a:ext cx="5212080" cy="4892040"/>
+          </a:xfrm>
+          <a:prstGeom prst="roundRect">
+            <a:avLst/>
+          </a:prstGeom>
+          <a:solidFill>
+            <a:srgbClr val="EEF2FF"/>
+          </a:solidFill>
+          <a:ln w="19050">
+            <a:solidFill>
+              <a:srgbClr val="0E7490"/>
+            </a:solidFill>
+          </a:ln>
+        </p:spPr>
+        <p:style>
+          <a:lnRef idx="1">
+            <a:schemeClr val="accent1"/>
+          </a:lnRef>
+          <a:fillRef idx="3">
+            <a:schemeClr val="accent1"/>
+          </a:fillRef>
+          <a:effectRef idx="2">
+            <a:schemeClr val="accent1"/>
+          </a:effectRef>
+          <a:fontRef idx="minor">
+            <a:schemeClr val="lt1"/>
+          </a:fontRef>
+        </p:style>
+        <p:txBody>
+          <a:bodyPr rtlCol="0" anchor="ctr"/>
+          <a:lstStyle/>
+          <a:p>
+            <a:pPr algn="ctr"/>
+          </a:p>
+        </p:txBody>
+      </p:sp>
+      <p:sp>
+        <p:nvSpPr>
+          <p:cNvPr id="9" name="TextBox 8"/>
+          <p:cNvSpPr txBox="1"/>
+          <p:nvPr/>
+        </p:nvSpPr>
+        <p:spPr>
+          <a:xfrm>
+            <a:off x="6492240" y="1371600"/>
+            <a:ext cx="4846320" cy="4572000"/>
+          </a:xfrm>
+          <a:prstGeom prst="rect">
+            <a:avLst/>
+          </a:prstGeom>
+          <a:noFill/>
+        </p:spPr>
+        <p:txBody>
+          <a:bodyPr wrap="square">
+            <a:spAutoFit/>
+          </a:bodyPr>
+          <a:lstStyle/>
+          <a:p>
+            <a:pPr>
+              <a:spcAft>
+                <a:spcPts val="1000"/>
+              </a:spcAft>
+              <a:defRPr b="1" sz="1450">
                 <a:solidFill>
                   <a:srgbClr val="0E7490"/>
                 </a:solidFill>
               </a:defRPr>
             </a:pPr>
             <a:r>
-              <a:t>Checksum Algorithm</a:t>
+              <a:t>💡 Critical Conceptual Takeaways</a:t>
             </a:r>
           </a:p>
           <a:p>
@@ -4243,12 +4944,12 @@
               </a:spcAft>
               <a:defRPr sz="1200">
                 <a:solidFill>
-                  <a:srgbClr val="1E293B"/>
-                </a:solidFill>
-              </a:defRPr>
-            </a:pPr>
-            <a:r>
-              <a:t>→ 1. Pad odd payload with 0x00</a:t>
+                  <a:srgbClr val="0F172A"/>
+                </a:solidFill>
+              </a:defRPr>
+            </a:pPr>
+            <a:r>
+              <a:t>✔ UDP header is minimal (8 bytes) with Source Port, Dest Port, Length, and Checksum.</a:t>
             </a:r>
           </a:p>
           <a:p>
@@ -4258,12 +4959,12 @@
               </a:spcAft>
               <a:defRPr sz="1200">
                 <a:solidFill>
-                  <a:srgbClr val="1E293B"/>
-                </a:solidFill>
-              </a:defRPr>
-            </a:pPr>
-            <a:r>
-              <a:t>→ 2. Add 16-bit words with carry wrap</a:t>
+                  <a:srgbClr val="0F172A"/>
+                </a:solidFill>
+              </a:defRPr>
+            </a:pPr>
+            <a:r>
+              <a:t>✔ Checksum calculation wraps around carry bits and inverts result for easy receiver verification (0xFFFF).</a:t>
             </a:r>
           </a:p>
           <a:p>
@@ -4273,56 +4974,26 @@
               </a:spcAft>
               <a:defRPr sz="1200">
                 <a:solidFill>
-                  <a:srgbClr val="1E293B"/>
-                </a:solidFill>
-              </a:defRPr>
-            </a:pPr>
-            <a:r>
-              <a:t>→ 3. Checksum = ~Sum (bitwise NOT)</a:t>
-            </a:r>
-          </a:p>
-          <a:p>
-            <a:pPr>
-              <a:spcAft>
-                <a:spcPts val="600"/>
-              </a:spcAft>
-              <a:defRPr sz="1200">
-                <a:solidFill>
-                  <a:srgbClr val="1E293B"/>
-                </a:solidFill>
-              </a:defRPr>
-            </a:pPr>
-            <a:r>
-              <a:t>→ 4. Receiver Sum + Checksum = 0xFFFF</a:t>
-            </a:r>
-          </a:p>
-          <a:p>
-            <a:pPr>
-              <a:spcAft>
-                <a:spcPts val="600"/>
-              </a:spcAft>
-              <a:defRPr sz="1200">
-                <a:solidFill>
-                  <a:srgbClr val="1E293B"/>
-                </a:solidFill>
-              </a:defRPr>
-            </a:pPr>
-            <a:r>
-              <a:t>→ 5. If not 0xFFFF -&gt; Packet Corrupted!</a:t>
-            </a:r>
-          </a:p>
-        </p:txBody>
-      </p:sp>
-      <p:sp>
-        <p:nvSpPr>
-          <p:cNvPr id="9" name="TextBox 8"/>
+                  <a:srgbClr val="0F172A"/>
+                </a:solidFill>
+              </a:defRPr>
+            </a:pPr>
+            <a:r>
+              <a:t>✔ UDP avoids TCP connection overhead and latency fluctuations from retransmissions.</a:t>
+            </a:r>
+          </a:p>
+        </p:txBody>
+      </p:sp>
+      <p:sp>
+        <p:nvSpPr>
+          <p:cNvPr id="10" name="TextBox 9"/>
           <p:cNvSpPr txBox="1"/>
           <p:nvPr/>
         </p:nvSpPr>
         <p:spPr>
           <a:xfrm>
-            <a:off x="731520" y="6309360"/>
-            <a:ext cx="10789920" cy="365760"/>
+            <a:off x="731520" y="6327648"/>
+            <a:ext cx="10789920" cy="320040"/>
           </a:xfrm>
           <a:prstGeom prst="rect">
             <a:avLst/>
@@ -4344,6 +5015,41 @@
             </a:pPr>
             <a:r>
               <a:t>PCCST501 Computer Networks | KTU 2024 Scheme | Prof. Anju Markose | Assistant Professor, Dept. of CSE | VJCET</a:t>
+            </a:r>
+          </a:p>
+        </p:txBody>
+      </p:sp>
+      <p:sp>
+        <p:nvSpPr>
+          <p:cNvPr id="11" name="TextBox 10"/>
+          <p:cNvSpPr txBox="1"/>
+          <p:nvPr/>
+        </p:nvSpPr>
+        <p:spPr>
+          <a:xfrm>
+            <a:off x="6858000" y="6327648"/>
+            <a:ext cx="4572000" cy="320040"/>
+          </a:xfrm>
+          <a:prstGeom prst="rect">
+            <a:avLst/>
+          </a:prstGeom>
+          <a:noFill/>
+        </p:spPr>
+        <p:txBody>
+          <a:bodyPr wrap="none">
+            <a:spAutoFit/>
+          </a:bodyPr>
+          <a:lstStyle/>
+          <a:p>
+            <a:pPr algn="r">
+              <a:defRPr sz="950">
+                <a:solidFill>
+                  <a:srgbClr val="64748B"/>
+                </a:solidFill>
+              </a:defRPr>
+            </a:pPr>
+            <a:r>
+              <a:t>Dept. of CSE, VJCET</a:t>
             </a:r>
           </a:p>
         </p:txBody>
